--- a/docs/Growth-v2-Business-Case.pptx
+++ b/docs/Growth-v2-Business-Case.pptx
@@ -1593,7 +1593,7 @@
           <a:p>
             <a:r>
               <a:rPr lang="en-US" dirty="0"/>
-              <a:t>Three tiers of evidence, never conflated. Clicks are exact and ours. Self-reports are free but biased upward. Only the Careers-confirmed number goes in a board paper.</a:t>
+              <a:t>Three tiers of evidence, never conflated. Clicks are exact and ours. Self-reports are free but biased upward. Only the HC Connect-confirmed number goes in a board paper.</a:t>
             </a:r>
             <a:endParaRPr lang="en-US" dirty="0"/>
           </a:p>
@@ -3449,7 +3449,7 @@
                 <a:ea typeface="Calibri" pitchFamily="34" charset="-122"/>
                 <a:cs typeface="Calibri" pitchFamily="34" charset="-120"/>
               </a:rPr>
-              <a:t>Exists only because of the tracking spend. Without a confirmed referral the hire is invisible in our data and belongs, as far as anyone can tell, to Careers.</a:t>
+              <a:t>Exists only because of the tracking spend. Without a confirmed referral the hire is invisible in our data and belongs, as far as anyone can tell, to HC Connect.</a:t>
             </a:r>
             <a:endParaRPr lang="en-US" sz="1150" dirty="0"/>
           </a:p>
@@ -7924,7 +7924,7 @@
                 <a:ea typeface="Cambria" pitchFamily="34" charset="-122"/>
                 <a:cs typeface="Cambria" pitchFamily="34" charset="-120"/>
               </a:rPr>
-              <a:t>Careers already runs internal vacancies</a:t>
+              <a:t>HC Connect already runs internal vacancies</a:t>
             </a:r>
             <a:endParaRPr lang="en-US" sz="3300" dirty="0"/>
           </a:p>
@@ -7963,7 +7963,7 @@
                 <a:ea typeface="Calibri" pitchFamily="34" charset="-122"/>
                 <a:cs typeface="Calibri" pitchFamily="34" charset="-120"/>
               </a:rPr>
-              <a:t>So v2 gives up the half it was never going to win, and keeps the half Careers cannot do.</a:t>
+              <a:t>HC Connect Internal Job Posting — “HC Connect” here. v2 keeps only the half it cannot do.</a:t>
             </a:r>
             <a:endParaRPr lang="en-US" sz="1350" dirty="0"/>
           </a:p>
@@ -8102,7 +8102,7 @@
                 <a:ea typeface="Cambria" pitchFamily="34" charset="-122"/>
                 <a:cs typeface="Cambria" pitchFamily="34" charset="-120"/>
               </a:rPr>
-              <a:t>Careers owns</a:t>
+              <a:t>HC Connect owns</a:t>
             </a:r>
             <a:endParaRPr lang="en-US" sz="2200" dirty="0"/>
           </a:p>
@@ -9101,7 +9101,7 @@
                 <a:ea typeface="Calibri" pitchFamily="34" charset="-122"/>
                 <a:cs typeface="Calibri" pitchFamily="34" charset="-120"/>
               </a:rPr>
-              <a:t>The vacancy appears on our board with a match score and its job description — the part Careers cannot do.</a:t>
+              <a:t>The vacancy appears on our board with a match score and its job description — the part HC Connect cannot do.</a:t>
             </a:r>
             <a:endParaRPr lang="en-US" sz="1250" dirty="0"/>
           </a:p>
@@ -9357,7 +9357,7 @@
                 <a:ea typeface="Calibri" pitchFamily="34" charset="-122"/>
                 <a:cs typeface="Calibri" pitchFamily="34" charset="-120"/>
               </a:rPr>
-              <a:t>Opening it mints a referral code and carries it to Careers on the link. The click is ours, exactly.</a:t>
+              <a:t>Opening it mints a referral code and carries it to HC Connect on the link. The click is ours, exactly.</a:t>
             </a:r>
             <a:endParaRPr lang="en-US" sz="1250" dirty="0"/>
           </a:p>
@@ -9869,7 +9869,7 @@
                 <a:ea typeface="Calibri" pitchFamily="34" charset="-122"/>
                 <a:cs typeface="Calibri" pitchFamily="34" charset="-120"/>
               </a:rPr>
-              <a:t>Quarterly, join our referral export against the Careers export on the referral code.</a:t>
+              <a:t>Quarterly, join our referral export against the HC Connect export on the referral code.</a:t>
             </a:r>
             <a:endParaRPr lang="en-US" sz="1250" dirty="0"/>
           </a:p>
@@ -9884,7 +9884,7 @@
         <p:spPr>
           <a:xfrm>
             <a:off x="9361170" y="4224528"/>
-            <a:ext cx="1536192" cy="224028"/>
+            <a:ext cx="1851660" cy="224028"/>
           </a:xfrm>
           <a:prstGeom prst="roundRect">
             <a:avLst>
@@ -9911,7 +9911,7 @@
         <p:spPr>
           <a:xfrm>
             <a:off x="9361170" y="4224528"/>
-            <a:ext cx="1536192" cy="224028"/>
+            <a:ext cx="1851660" cy="224028"/>
           </a:xfrm>
           <a:prstGeom prst="rect">
             <a:avLst/>
@@ -9935,7 +9935,7 @@
                 <a:ea typeface="Calibri" pitchFamily="34" charset="-122"/>
                 <a:cs typeface="Calibri" pitchFamily="34" charset="-120"/>
               </a:rPr>
-              <a:t>FROM CAREERS</a:t>
+              <a:t>FROM HC CONNECT</a:t>
             </a:r>
             <a:endParaRPr lang="en-US" sz="900" dirty="0"/>
           </a:p>
@@ -10238,7 +10238,7 @@
                 <a:ea typeface="Calibri" pitchFamily="34" charset="-122"/>
                 <a:cs typeface="Calibri" pitchFamily="34" charset="-120"/>
               </a:rPr>
-              <a:t>v1 owned the whole vacancy funnel, so measuring it was free — the data was already in our database. v2 hands that funnel to Careers and keeps only the top of it. The outcome now sits in someone else’s system, and has to be tracked, handed off, self-reported and reconciled to be claimable at all.</a:t>
+              <a:t>v1 owned the whole vacancy funnel, so measuring it was free — the data was already in our database. v2 hands that funnel to HC Connect and keeps only the top of it. The outcome now sits in someone else’s system, and has to be tracked, handed off, self-reported and reconciled to be claimable at all.</a:t>
             </a:r>
             <a:endParaRPr lang="en-US" sz="1450" dirty="0"/>
           </a:p>
@@ -11434,7 +11434,7 @@
                 <a:ea typeface="Calibri" pitchFamily="34" charset="-122"/>
                 <a:cs typeface="Calibri" pitchFamily="34" charset="-120"/>
               </a:rPr>
-              <a:t>Launch the board first; measure Q1 from the Careers source field alone.</a:t>
+              <a:t>Launch the board first; measure Q1 from the HC Connect source field alone.</a:t>
             </a:r>
             <a:endParaRPr lang="en-US" sz="1150" dirty="0"/>
           </a:p>
@@ -12282,7 +12282,7 @@
                 <a:ea typeface="Calibri" pitchFamily="34" charset="-122"/>
                 <a:cs typeface="Calibri" pitchFamily="34" charset="-120"/>
               </a:rPr>
-              <a:t>The entire reason our board beats a plain Careers listing. Without it we have built a duplicate job board.</a:t>
+              <a:t>The entire reason our board beats a plain HC Connect listing. Without it we have built a duplicate job board.</a:t>
             </a:r>
             <a:endParaRPr lang="en-US" sz="1150" dirty="0"/>
           </a:p>

--- a/docs/Growth-v2-Business-Case.pptx
+++ b/docs/Growth-v2-Business-Case.pptx
@@ -2527,7 +2527,7 @@
                 <a:ea typeface="Calibri" pitchFamily="34" charset="-122"/>
                 <a:cs typeface="Calibri" pitchFamily="34" charset="-120"/>
               </a:rPr>
-              <a:t>GROWTH · HC TALENT MARKETPLACE</a:t>
+              <a:t>GROWTH · HOME CREDIT PH</a:t>
             </a:r>
             <a:endParaRPr lang="en-US" sz="1200" dirty="0"/>
           </a:p>
